--- a/projects/drug-information-practical/slides/ch06-critical-appraisal.pptx
+++ b/projects/drug-information-practical/slides/ch06-critical-appraisal.pptx
@@ -18981,7 +18981,7 @@
                     <a:lstStyle/>
                     <a:p>
                       <a:r>
-                        <a:rPr sz="1200" i="0" b="1">
+                        <a:rPr sz="1400" i="0" b="1">
                           <a:solidFill>
                             <a:srgbClr val="FFFFFF"/>
                           </a:solidFill>
@@ -19003,7 +19003,7 @@
                     <a:lstStyle/>
                     <a:p>
                       <a:r>
-                        <a:rPr sz="1200" i="0" b="1">
+                        <a:rPr sz="1400" i="0" b="1">
                           <a:solidFill>
                             <a:srgbClr val="FFFFFF"/>
                           </a:solidFill>
@@ -19025,7 +19025,7 @@
                     <a:lstStyle/>
                     <a:p>
                       <a:r>
-                        <a:rPr sz="1200" i="0" b="1">
+                        <a:rPr sz="1400" i="0" b="1">
                           <a:solidFill>
                             <a:srgbClr val="FFFFFF"/>
                           </a:solidFill>
@@ -19049,7 +19049,7 @@
                     <a:lstStyle/>
                     <a:p>
                       <a:r>
-                        <a:rPr sz="1300" i="0" b="1">
+                        <a:rPr sz="1500" i="0" b="1">
                           <a:solidFill>
                             <a:srgbClr val="2B211C"/>
                           </a:solidFill>
@@ -19071,7 +19071,7 @@
                     <a:lstStyle/>
                     <a:p>
                       <a:r>
-                        <a:rPr sz="1300" i="0" b="0">
+                        <a:rPr sz="1500" i="0" b="0">
                           <a:solidFill>
                             <a:srgbClr val="2B211C"/>
                           </a:solidFill>
@@ -19093,7 +19093,7 @@
                     <a:lstStyle/>
                     <a:p>
                       <a:r>
-                        <a:rPr sz="1300" i="0" b="0">
+                        <a:rPr sz="1500" i="0" b="0">
                           <a:solidFill>
                             <a:srgbClr val="2B211C"/>
                           </a:solidFill>
@@ -19117,7 +19117,7 @@
                     <a:lstStyle/>
                     <a:p>
                       <a:r>
-                        <a:rPr sz="1300" i="0" b="1">
+                        <a:rPr sz="1500" i="0" b="1">
                           <a:solidFill>
                             <a:srgbClr val="2B211C"/>
                           </a:solidFill>
@@ -19139,7 +19139,7 @@
                     <a:lstStyle/>
                     <a:p>
                       <a:r>
-                        <a:rPr sz="1300" i="0" b="0">
+                        <a:rPr sz="1500" i="0" b="0">
                           <a:solidFill>
                             <a:srgbClr val="2B211C"/>
                           </a:solidFill>
@@ -19161,7 +19161,7 @@
                     <a:lstStyle/>
                     <a:p>
                       <a:r>
-                        <a:rPr sz="1300" i="0" b="0">
+                        <a:rPr sz="1500" i="0" b="0">
                           <a:solidFill>
                             <a:srgbClr val="2B211C"/>
                           </a:solidFill>
@@ -19185,7 +19185,7 @@
                     <a:lstStyle/>
                     <a:p>
                       <a:r>
-                        <a:rPr sz="1300" i="0" b="1">
+                        <a:rPr sz="1500" i="0" b="1">
                           <a:solidFill>
                             <a:srgbClr val="2B211C"/>
                           </a:solidFill>
@@ -19207,7 +19207,7 @@
                     <a:lstStyle/>
                     <a:p>
                       <a:r>
-                        <a:rPr sz="1300" i="0" b="0">
+                        <a:rPr sz="1500" i="0" b="0">
                           <a:solidFill>
                             <a:srgbClr val="2B211C"/>
                           </a:solidFill>
@@ -19229,7 +19229,7 @@
                     <a:lstStyle/>
                     <a:p>
                       <a:r>
-                        <a:rPr sz="1300" i="0" b="0">
+                        <a:rPr sz="1500" i="0" b="0">
                           <a:solidFill>
                             <a:srgbClr val="2B211C"/>
                           </a:solidFill>
@@ -19253,7 +19253,7 @@
                     <a:lstStyle/>
                     <a:p>
                       <a:r>
-                        <a:rPr sz="1300" i="0" b="1">
+                        <a:rPr sz="1500" i="0" b="1">
                           <a:solidFill>
                             <a:srgbClr val="2B211C"/>
                           </a:solidFill>
@@ -19275,7 +19275,7 @@
                     <a:lstStyle/>
                     <a:p>
                       <a:r>
-                        <a:rPr sz="1300" i="0" b="0">
+                        <a:rPr sz="1500" i="0" b="0">
                           <a:solidFill>
                             <a:srgbClr val="2B211C"/>
                           </a:solidFill>
@@ -19297,7 +19297,7 @@
                     <a:lstStyle/>
                     <a:p>
                       <a:r>
-                        <a:rPr sz="1300" i="0" b="0">
+                        <a:rPr sz="1500" i="0" b="0">
                           <a:solidFill>
                             <a:srgbClr val="2B211C"/>
                           </a:solidFill>
@@ -19321,7 +19321,7 @@
                     <a:lstStyle/>
                     <a:p>
                       <a:r>
-                        <a:rPr sz="1300" i="0" b="1">
+                        <a:rPr sz="1500" i="0" b="1">
                           <a:solidFill>
                             <a:srgbClr val="2B211C"/>
                           </a:solidFill>
@@ -19343,7 +19343,7 @@
                     <a:lstStyle/>
                     <a:p>
                       <a:r>
-                        <a:rPr sz="1300" i="0" b="0">
+                        <a:rPr sz="1500" i="0" b="0">
                           <a:solidFill>
                             <a:srgbClr val="2B211C"/>
                           </a:solidFill>
@@ -19365,7 +19365,7 @@
                     <a:lstStyle/>
                     <a:p>
                       <a:r>
-                        <a:rPr sz="1300" i="0" b="0">
+                        <a:rPr sz="1500" i="0" b="0">
                           <a:solidFill>
                             <a:srgbClr val="2B211C"/>
                           </a:solidFill>
@@ -19389,7 +19389,7 @@
                     <a:lstStyle/>
                     <a:p>
                       <a:r>
-                        <a:rPr sz="1300" i="0" b="1">
+                        <a:rPr sz="1500" i="0" b="1">
                           <a:solidFill>
                             <a:srgbClr val="2B211C"/>
                           </a:solidFill>
@@ -19411,7 +19411,7 @@
                     <a:lstStyle/>
                     <a:p>
                       <a:r>
-                        <a:rPr sz="1300" i="0" b="0">
+                        <a:rPr sz="1500" i="0" b="0">
                           <a:solidFill>
                             <a:srgbClr val="2B211C"/>
                           </a:solidFill>
@@ -19433,7 +19433,7 @@
                     <a:lstStyle/>
                     <a:p>
                       <a:r>
-                        <a:rPr sz="1300" i="0" b="0">
+                        <a:rPr sz="1500" i="0" b="0">
                           <a:solidFill>
                             <a:srgbClr val="2B211C"/>
                           </a:solidFill>
@@ -19457,7 +19457,7 @@
                     <a:lstStyle/>
                     <a:p>
                       <a:r>
-                        <a:rPr sz="1300" i="0" b="1">
+                        <a:rPr sz="1500" i="0" b="1">
                           <a:solidFill>
                             <a:srgbClr val="2B211C"/>
                           </a:solidFill>
@@ -19479,7 +19479,7 @@
                     <a:lstStyle/>
                     <a:p>
                       <a:r>
-                        <a:rPr sz="1300" i="0" b="0">
+                        <a:rPr sz="1500" i="0" b="0">
                           <a:solidFill>
                             <a:srgbClr val="2B211C"/>
                           </a:solidFill>
@@ -19501,7 +19501,7 @@
                     <a:lstStyle/>
                     <a:p>
                       <a:r>
-                        <a:rPr sz="1300" i="0" b="0">
+                        <a:rPr sz="1500" i="0" b="0">
                           <a:solidFill>
                             <a:srgbClr val="2B211C"/>
                           </a:solidFill>

--- a/projects/drug-information-practical/slides/ch06-critical-appraisal.pptx
+++ b/projects/drug-information-practical/slides/ch06-critical-appraisal.pptx
@@ -5647,7 +5647,7 @@
     <p:bg>
       <p:bgPr>
         <a:solidFill>
-          <a:srgbClr val="FFFFFF"/>
+          <a:srgbClr val="F5EDE3"/>
         </a:solidFill>
         <a:effectLst/>
       </p:bgPr>
@@ -6143,7 +6143,7 @@
     <p:bg>
       <p:bgPr>
         <a:solidFill>
-          <a:srgbClr val="FFFFFF"/>
+          <a:srgbClr val="F5EDE3"/>
         </a:solidFill>
         <a:effectLst/>
       </p:bgPr>
@@ -6518,7 +6518,7 @@
     <p:bg>
       <p:bgPr>
         <a:solidFill>
-          <a:srgbClr val="FFFFFF"/>
+          <a:srgbClr val="F5EDE3"/>
         </a:solidFill>
         <a:effectLst/>
       </p:bgPr>
@@ -7170,7 +7170,7 @@
     <p:bg>
       <p:bgPr>
         <a:solidFill>
-          <a:srgbClr val="FFFFFF"/>
+          <a:srgbClr val="F5EDE3"/>
         </a:solidFill>
         <a:effectLst/>
       </p:bgPr>
@@ -7545,7 +7545,7 @@
     <p:bg>
       <p:bgPr>
         <a:solidFill>
-          <a:srgbClr val="FFFFFF"/>
+          <a:srgbClr val="F5EDE3"/>
         </a:solidFill>
         <a:effectLst/>
       </p:bgPr>
@@ -7821,7 +7821,7 @@
     <p:bg>
       <p:bgPr>
         <a:solidFill>
-          <a:srgbClr val="FFFFFF"/>
+          <a:srgbClr val="F5EDE3"/>
         </a:solidFill>
         <a:effectLst/>
       </p:bgPr>
@@ -8627,7 +8627,7 @@
     <p:bg>
       <p:bgPr>
         <a:solidFill>
-          <a:srgbClr val="FFFFFF"/>
+          <a:srgbClr val="F5EDE3"/>
         </a:solidFill>
         <a:effectLst/>
       </p:bgPr>
@@ -9476,7 +9476,7 @@
     <p:bg>
       <p:bgPr>
         <a:solidFill>
-          <a:srgbClr val="FFFFFF"/>
+          <a:srgbClr val="F5EDE3"/>
         </a:solidFill>
         <a:effectLst/>
       </p:bgPr>
@@ -10282,7 +10282,7 @@
     <p:bg>
       <p:bgPr>
         <a:solidFill>
-          <a:srgbClr val="FFFFFF"/>
+          <a:srgbClr val="F5EDE3"/>
         </a:solidFill>
         <a:effectLst/>
       </p:bgPr>
@@ -11131,7 +11131,7 @@
     <p:bg>
       <p:bgPr>
         <a:solidFill>
-          <a:srgbClr val="FFFFFF"/>
+          <a:srgbClr val="F5EDE3"/>
         </a:solidFill>
         <a:effectLst/>
       </p:bgPr>
@@ -11937,7 +11937,7 @@
     <p:bg>
       <p:bgPr>
         <a:solidFill>
-          <a:srgbClr val="FFFFFF"/>
+          <a:srgbClr val="F5EDE3"/>
         </a:solidFill>
         <a:effectLst/>
       </p:bgPr>
@@ -12675,7 +12675,7 @@
     <p:bg>
       <p:bgPr>
         <a:solidFill>
-          <a:srgbClr val="FFFFFF"/>
+          <a:srgbClr val="F5EDE3"/>
         </a:solidFill>
         <a:effectLst/>
       </p:bgPr>
@@ -13524,7 +13524,7 @@
     <p:bg>
       <p:bgPr>
         <a:solidFill>
-          <a:srgbClr val="FFFFFF"/>
+          <a:srgbClr val="F5EDE3"/>
         </a:solidFill>
         <a:effectLst/>
       </p:bgPr>
@@ -14330,7 +14330,7 @@
     <p:bg>
       <p:bgPr>
         <a:solidFill>
-          <a:srgbClr val="FFFFFF"/>
+          <a:srgbClr val="F5EDE3"/>
         </a:solidFill>
         <a:effectLst/>
       </p:bgPr>
@@ -15179,7 +15179,7 @@
     <p:bg>
       <p:bgPr>
         <a:solidFill>
-          <a:srgbClr val="FFFFFF"/>
+          <a:srgbClr val="F5EDE3"/>
         </a:solidFill>
         <a:effectLst/>
       </p:bgPr>
@@ -15985,7 +15985,7 @@
     <p:bg>
       <p:bgPr>
         <a:solidFill>
-          <a:srgbClr val="FFFFFF"/>
+          <a:srgbClr val="F5EDE3"/>
         </a:solidFill>
         <a:effectLst/>
       </p:bgPr>
@@ -16834,7 +16834,7 @@
     <p:bg>
       <p:bgPr>
         <a:solidFill>
-          <a:srgbClr val="FFFFFF"/>
+          <a:srgbClr val="F5EDE3"/>
         </a:solidFill>
         <a:effectLst/>
       </p:bgPr>
@@ -17687,7 +17687,7 @@
     <p:bg>
       <p:bgPr>
         <a:solidFill>
-          <a:srgbClr val="FFFFFF"/>
+          <a:srgbClr val="F5EDE3"/>
         </a:solidFill>
         <a:effectLst/>
       </p:bgPr>
@@ -18275,7 +18275,7 @@
     <p:bg>
       <p:bgPr>
         <a:solidFill>
-          <a:srgbClr val="FFFFFF"/>
+          <a:srgbClr val="F5EDE3"/>
         </a:solidFill>
         <a:effectLst/>
       </p:bgPr>
@@ -18725,7 +18725,7 @@
     <p:bg>
       <p:bgPr>
         <a:solidFill>
-          <a:srgbClr val="FFFFFF"/>
+          <a:srgbClr val="F5EDE3"/>
         </a:solidFill>
         <a:effectLst/>
       </p:bgPr>
@@ -19536,7 +19536,7 @@
     <p:bg>
       <p:bgPr>
         <a:solidFill>
-          <a:srgbClr val="FFFFFF"/>
+          <a:srgbClr val="F5EDE3"/>
         </a:solidFill>
         <a:effectLst/>
       </p:bgPr>
@@ -20075,7 +20075,7 @@
     <p:bg>
       <p:bgPr>
         <a:solidFill>
-          <a:srgbClr val="FFFFFF"/>
+          <a:srgbClr val="F5EDE3"/>
         </a:solidFill>
         <a:effectLst/>
       </p:bgPr>
@@ -20420,7 +20420,7 @@
     <p:bg>
       <p:bgPr>
         <a:solidFill>
-          <a:srgbClr val="FFFFFF"/>
+          <a:srgbClr val="F5EDE3"/>
         </a:solidFill>
         <a:effectLst/>
       </p:bgPr>
@@ -20852,7 +20852,7 @@
     <p:bg>
       <p:bgPr>
         <a:solidFill>
-          <a:srgbClr val="FFFFFF"/>
+          <a:srgbClr val="F5EDE3"/>
         </a:solidFill>
         <a:effectLst/>
       </p:bgPr>
